--- a/week_10/PsychoPy_Lecture_2.pptx
+++ b/week_10/PsychoPy_Lecture_2.pptx
@@ -9,7 +9,7 @@
   </p:notesMasterIdLst>
   <p:sldIdLst>
     <p:sldId id="312" r:id="rId2"/>
-    <p:sldId id="322" r:id="rId3"/>
+    <p:sldId id="361" r:id="rId3"/>
     <p:sldId id="342" r:id="rId4"/>
     <p:sldId id="352" r:id="rId5"/>
     <p:sldId id="353" r:id="rId6"/>
@@ -541,6 +541,158 @@
     </pc:docChg>
   </pc:docChgLst>
   <pc:docChgLst>
+    <pc:chgData name="Castegnaro, Andrea" userId="e719bb20-b48f-4237-97c2-e35c3e0dc9cd" providerId="ADAL" clId="{D0DDA42C-5D7A-4C2D-9DAF-C527848DC506}"/>
+    <pc:docChg chg="undo custSel modSld">
+      <pc:chgData name="Castegnaro, Andrea" userId="e719bb20-b48f-4237-97c2-e35c3e0dc9cd" providerId="ADAL" clId="{D0DDA42C-5D7A-4C2D-9DAF-C527848DC506}" dt="2024-01-19T10:49:54.422" v="210"/>
+      <pc:docMkLst>
+        <pc:docMk/>
+      </pc:docMkLst>
+      <pc:sldChg chg="modSp mod">
+        <pc:chgData name="Castegnaro, Andrea" userId="e719bb20-b48f-4237-97c2-e35c3e0dc9cd" providerId="ADAL" clId="{D0DDA42C-5D7A-4C2D-9DAF-C527848DC506}" dt="2024-01-19T09:25:33.200" v="0"/>
+        <pc:sldMkLst>
+          <pc:docMk/>
+          <pc:sldMk cId="2445713399" sldId="312"/>
+        </pc:sldMkLst>
+      </pc:sldChg>
+      <pc:sldChg chg="modNotesTx">
+        <pc:chgData name="Castegnaro, Andrea" userId="e719bb20-b48f-4237-97c2-e35c3e0dc9cd" providerId="ADAL" clId="{D0DDA42C-5D7A-4C2D-9DAF-C527848DC506}" dt="2024-01-19T09:36:44.309" v="30" actId="20577"/>
+        <pc:sldMkLst>
+          <pc:docMk/>
+          <pc:sldMk cId="3617399448" sldId="342"/>
+        </pc:sldMkLst>
+      </pc:sldChg>
+      <pc:sldChg chg="modNotesTx">
+        <pc:chgData name="Castegnaro, Andrea" userId="e719bb20-b48f-4237-97c2-e35c3e0dc9cd" providerId="ADAL" clId="{D0DDA42C-5D7A-4C2D-9DAF-C527848DC506}" dt="2024-01-19T10:49:54.422" v="210"/>
+        <pc:sldMkLst>
+          <pc:docMk/>
+          <pc:sldMk cId="2895304120" sldId="343"/>
+        </pc:sldMkLst>
+      </pc:sldChg>
+      <pc:sldChg chg="modNotesTx">
+        <pc:chgData name="Castegnaro, Andrea" userId="e719bb20-b48f-4237-97c2-e35c3e0dc9cd" providerId="ADAL" clId="{D0DDA42C-5D7A-4C2D-9DAF-C527848DC506}" dt="2024-01-19T10:43:51.391" v="189" actId="20577"/>
+        <pc:sldMkLst>
+          <pc:docMk/>
+          <pc:sldMk cId="1415608395" sldId="345"/>
+        </pc:sldMkLst>
+      </pc:sldChg>
+      <pc:sldChg chg="modNotesTx">
+        <pc:chgData name="Castegnaro, Andrea" userId="e719bb20-b48f-4237-97c2-e35c3e0dc9cd" providerId="ADAL" clId="{D0DDA42C-5D7A-4C2D-9DAF-C527848DC506}" dt="2024-01-19T10:46:43.630" v="198" actId="20577"/>
+        <pc:sldMkLst>
+          <pc:docMk/>
+          <pc:sldMk cId="930155706" sldId="346"/>
+        </pc:sldMkLst>
+      </pc:sldChg>
+      <pc:sldChg chg="modNotesTx">
+        <pc:chgData name="Castegnaro, Andrea" userId="e719bb20-b48f-4237-97c2-e35c3e0dc9cd" providerId="ADAL" clId="{D0DDA42C-5D7A-4C2D-9DAF-C527848DC506}" dt="2024-01-19T09:45:22.193" v="52"/>
+        <pc:sldMkLst>
+          <pc:docMk/>
+          <pc:sldMk cId="377400704" sldId="352"/>
+        </pc:sldMkLst>
+      </pc:sldChg>
+      <pc:sldChg chg="modSp mod modNotesTx">
+        <pc:chgData name="Castegnaro, Andrea" userId="e719bb20-b48f-4237-97c2-e35c3e0dc9cd" providerId="ADAL" clId="{D0DDA42C-5D7A-4C2D-9DAF-C527848DC506}" dt="2024-01-19T10:41:05.190" v="184"/>
+        <pc:sldMkLst>
+          <pc:docMk/>
+          <pc:sldMk cId="1945739754" sldId="353"/>
+        </pc:sldMkLst>
+      </pc:sldChg>
+      <pc:sldChg chg="modSp mod">
+        <pc:chgData name="Castegnaro, Andrea" userId="e719bb20-b48f-4237-97c2-e35c3e0dc9cd" providerId="ADAL" clId="{D0DDA42C-5D7A-4C2D-9DAF-C527848DC506}" dt="2024-01-19T09:28:49.418" v="3"/>
+        <pc:sldMkLst>
+          <pc:docMk/>
+          <pc:sldMk cId="4066632436" sldId="360"/>
+        </pc:sldMkLst>
+      </pc:sldChg>
+    </pc:docChg>
+  </pc:docChgLst>
+  <pc:docChgLst>
+    <pc:chgData name="Castegnaro, Andrea" userId="e719bb20-b48f-4237-97c2-e35c3e0dc9cd" providerId="ADAL" clId="{6B0B3B43-C1DE-4F71-93A9-FB02E1545C0E}"/>
+    <pc:docChg chg="custSel addSld delSld modSld delMainMaster delSection modSection">
+      <pc:chgData name="Castegnaro, Andrea" userId="e719bb20-b48f-4237-97c2-e35c3e0dc9cd" providerId="ADAL" clId="{6B0B3B43-C1DE-4F71-93A9-FB02E1545C0E}" dt="2022-01-17T15:04:59.362" v="281" actId="700"/>
+      <pc:docMkLst>
+        <pc:docMk/>
+      </pc:docMkLst>
+      <pc:sldChg chg="new del">
+        <pc:chgData name="Castegnaro, Andrea" userId="e719bb20-b48f-4237-97c2-e35c3e0dc9cd" providerId="ADAL" clId="{6B0B3B43-C1DE-4F71-93A9-FB02E1545C0E}" dt="2022-01-13T16:14:43.903" v="1" actId="47"/>
+        <pc:sldMkLst>
+          <pc:docMk/>
+          <pc:sldMk cId="1085287797" sldId="256"/>
+        </pc:sldMkLst>
+      </pc:sldChg>
+      <pc:sldChg chg="modSp mod modTransition">
+        <pc:chgData name="Castegnaro, Andrea" userId="e719bb20-b48f-4237-97c2-e35c3e0dc9cd" providerId="ADAL" clId="{6B0B3B43-C1DE-4F71-93A9-FB02E1545C0E}" dt="2022-01-17T14:56:18.083" v="276" actId="20577"/>
+        <pc:sldMkLst>
+          <pc:docMk/>
+          <pc:sldMk cId="2445713399" sldId="312"/>
+        </pc:sldMkLst>
+      </pc:sldChg>
+      <pc:sldChg chg="modTransition">
+        <pc:chgData name="Castegnaro, Andrea" userId="e719bb20-b48f-4237-97c2-e35c3e0dc9cd" providerId="ADAL" clId="{6B0B3B43-C1DE-4F71-93A9-FB02E1545C0E}" dt="2022-01-13T16:16:32.731" v="64"/>
+        <pc:sldMkLst>
+          <pc:docMk/>
+          <pc:sldMk cId="2471698210" sldId="313"/>
+        </pc:sldMkLst>
+      </pc:sldChg>
+      <pc:sldChg chg="modTransition">
+        <pc:chgData name="Castegnaro, Andrea" userId="e719bb20-b48f-4237-97c2-e35c3e0dc9cd" providerId="ADAL" clId="{6B0B3B43-C1DE-4F71-93A9-FB02E1545C0E}" dt="2022-01-13T16:16:32.731" v="64"/>
+        <pc:sldMkLst>
+          <pc:docMk/>
+          <pc:sldMk cId="839390016" sldId="314"/>
+        </pc:sldMkLst>
+      </pc:sldChg>
+      <pc:sldChg chg="modTransition">
+        <pc:chgData name="Castegnaro, Andrea" userId="e719bb20-b48f-4237-97c2-e35c3e0dc9cd" providerId="ADAL" clId="{6B0B3B43-C1DE-4F71-93A9-FB02E1545C0E}" dt="2022-01-13T16:16:32.731" v="64"/>
+        <pc:sldMkLst>
+          <pc:docMk/>
+          <pc:sldMk cId="2442215223" sldId="315"/>
+        </pc:sldMkLst>
+      </pc:sldChg>
+      <pc:sldChg chg="modTransition">
+        <pc:chgData name="Castegnaro, Andrea" userId="e719bb20-b48f-4237-97c2-e35c3e0dc9cd" providerId="ADAL" clId="{6B0B3B43-C1DE-4F71-93A9-FB02E1545C0E}" dt="2022-01-13T16:16:32.731" v="64"/>
+        <pc:sldMkLst>
+          <pc:docMk/>
+          <pc:sldMk cId="2590270098" sldId="316"/>
+        </pc:sldMkLst>
+      </pc:sldChg>
+      <pc:sldChg chg="modTransition">
+        <pc:chgData name="Castegnaro, Andrea" userId="e719bb20-b48f-4237-97c2-e35c3e0dc9cd" providerId="ADAL" clId="{6B0B3B43-C1DE-4F71-93A9-FB02E1545C0E}" dt="2022-01-13T16:16:32.731" v="64"/>
+        <pc:sldMkLst>
+          <pc:docMk/>
+          <pc:sldMk cId="3996795517" sldId="317"/>
+        </pc:sldMkLst>
+      </pc:sldChg>
+      <pc:sldChg chg="modTransition">
+        <pc:chgData name="Castegnaro, Andrea" userId="e719bb20-b48f-4237-97c2-e35c3e0dc9cd" providerId="ADAL" clId="{6B0B3B43-C1DE-4F71-93A9-FB02E1545C0E}" dt="2022-01-13T16:16:32.731" v="64"/>
+        <pc:sldMkLst>
+          <pc:docMk/>
+          <pc:sldMk cId="2282461073" sldId="319"/>
+        </pc:sldMkLst>
+      </pc:sldChg>
+      <pc:sldChg chg="addSp delSp modSp add mod chgLayout">
+        <pc:chgData name="Castegnaro, Andrea" userId="e719bb20-b48f-4237-97c2-e35c3e0dc9cd" providerId="ADAL" clId="{6B0B3B43-C1DE-4F71-93A9-FB02E1545C0E}" dt="2022-01-17T15:04:59.362" v="281" actId="700"/>
+        <pc:sldMkLst>
+          <pc:docMk/>
+          <pc:sldMk cId="3098246948" sldId="320"/>
+        </pc:sldMkLst>
+      </pc:sldChg>
+      <pc:sldMasterChg chg="del addSldLayout delSldLayout">
+        <pc:chgData name="Castegnaro, Andrea" userId="e719bb20-b48f-4237-97c2-e35c3e0dc9cd" providerId="ADAL" clId="{6B0B3B43-C1DE-4F71-93A9-FB02E1545C0E}" dt="2022-01-13T16:14:43.903" v="1" actId="47"/>
+        <pc:sldMasterMkLst>
+          <pc:docMk/>
+          <pc:sldMasterMk cId="648575456" sldId="2147483648"/>
+        </pc:sldMasterMkLst>
+        <pc:sldLayoutChg chg="add del">
+          <pc:chgData name="Castegnaro, Andrea" userId="e719bb20-b48f-4237-97c2-e35c3e0dc9cd" providerId="ADAL" clId="{6B0B3B43-C1DE-4F71-93A9-FB02E1545C0E}" dt="2022-01-13T16:14:43.903" v="1" actId="47"/>
+          <pc:sldLayoutMkLst>
+            <pc:docMk/>
+            <pc:sldMasterMk cId="648575456" sldId="2147483648"/>
+            <pc:sldLayoutMk cId="1339338325" sldId="2147483649"/>
+          </pc:sldLayoutMkLst>
+        </pc:sldLayoutChg>
+      </pc:sldMasterChg>
+    </pc:docChg>
+  </pc:docChgLst>
+  <pc:docChgLst>
     <pc:chgData name="Castegnaro, Andrea" userId="e719bb20-b48f-4237-97c2-e35c3e0dc9cd" providerId="ADAL" clId="{EA726ED7-21E9-4571-946F-912AA8ECBF62}"/>
     <pc:docChg chg="undo custSel delSld modSld">
       <pc:chgData name="Castegnaro, Andrea" userId="e719bb20-b48f-4237-97c2-e35c3e0dc9cd" providerId="ADAL" clId="{EA726ED7-21E9-4571-946F-912AA8ECBF62}" dt="2025-01-08T17:50:43.334" v="4309" actId="20577"/>
@@ -924,158 +1076,6 @@
             <ac:spMk id="3" creationId="{780435C9-5DBC-4F47-AF8A-976FB0A75DE2}"/>
           </ac:spMkLst>
         </pc:spChg>
-      </pc:sldChg>
-    </pc:docChg>
-  </pc:docChgLst>
-  <pc:docChgLst>
-    <pc:chgData name="Castegnaro, Andrea" userId="e719bb20-b48f-4237-97c2-e35c3e0dc9cd" providerId="ADAL" clId="{6B0B3B43-C1DE-4F71-93A9-FB02E1545C0E}"/>
-    <pc:docChg chg="custSel addSld delSld modSld delMainMaster delSection modSection">
-      <pc:chgData name="Castegnaro, Andrea" userId="e719bb20-b48f-4237-97c2-e35c3e0dc9cd" providerId="ADAL" clId="{6B0B3B43-C1DE-4F71-93A9-FB02E1545C0E}" dt="2022-01-17T15:04:59.362" v="281" actId="700"/>
-      <pc:docMkLst>
-        <pc:docMk/>
-      </pc:docMkLst>
-      <pc:sldChg chg="new del">
-        <pc:chgData name="Castegnaro, Andrea" userId="e719bb20-b48f-4237-97c2-e35c3e0dc9cd" providerId="ADAL" clId="{6B0B3B43-C1DE-4F71-93A9-FB02E1545C0E}" dt="2022-01-13T16:14:43.903" v="1" actId="47"/>
-        <pc:sldMkLst>
-          <pc:docMk/>
-          <pc:sldMk cId="1085287797" sldId="256"/>
-        </pc:sldMkLst>
-      </pc:sldChg>
-      <pc:sldChg chg="modSp mod modTransition">
-        <pc:chgData name="Castegnaro, Andrea" userId="e719bb20-b48f-4237-97c2-e35c3e0dc9cd" providerId="ADAL" clId="{6B0B3B43-C1DE-4F71-93A9-FB02E1545C0E}" dt="2022-01-17T14:56:18.083" v="276" actId="20577"/>
-        <pc:sldMkLst>
-          <pc:docMk/>
-          <pc:sldMk cId="2445713399" sldId="312"/>
-        </pc:sldMkLst>
-      </pc:sldChg>
-      <pc:sldChg chg="modTransition">
-        <pc:chgData name="Castegnaro, Andrea" userId="e719bb20-b48f-4237-97c2-e35c3e0dc9cd" providerId="ADAL" clId="{6B0B3B43-C1DE-4F71-93A9-FB02E1545C0E}" dt="2022-01-13T16:16:32.731" v="64"/>
-        <pc:sldMkLst>
-          <pc:docMk/>
-          <pc:sldMk cId="2471698210" sldId="313"/>
-        </pc:sldMkLst>
-      </pc:sldChg>
-      <pc:sldChg chg="modTransition">
-        <pc:chgData name="Castegnaro, Andrea" userId="e719bb20-b48f-4237-97c2-e35c3e0dc9cd" providerId="ADAL" clId="{6B0B3B43-C1DE-4F71-93A9-FB02E1545C0E}" dt="2022-01-13T16:16:32.731" v="64"/>
-        <pc:sldMkLst>
-          <pc:docMk/>
-          <pc:sldMk cId="839390016" sldId="314"/>
-        </pc:sldMkLst>
-      </pc:sldChg>
-      <pc:sldChg chg="modTransition">
-        <pc:chgData name="Castegnaro, Andrea" userId="e719bb20-b48f-4237-97c2-e35c3e0dc9cd" providerId="ADAL" clId="{6B0B3B43-C1DE-4F71-93A9-FB02E1545C0E}" dt="2022-01-13T16:16:32.731" v="64"/>
-        <pc:sldMkLst>
-          <pc:docMk/>
-          <pc:sldMk cId="2442215223" sldId="315"/>
-        </pc:sldMkLst>
-      </pc:sldChg>
-      <pc:sldChg chg="modTransition">
-        <pc:chgData name="Castegnaro, Andrea" userId="e719bb20-b48f-4237-97c2-e35c3e0dc9cd" providerId="ADAL" clId="{6B0B3B43-C1DE-4F71-93A9-FB02E1545C0E}" dt="2022-01-13T16:16:32.731" v="64"/>
-        <pc:sldMkLst>
-          <pc:docMk/>
-          <pc:sldMk cId="2590270098" sldId="316"/>
-        </pc:sldMkLst>
-      </pc:sldChg>
-      <pc:sldChg chg="modTransition">
-        <pc:chgData name="Castegnaro, Andrea" userId="e719bb20-b48f-4237-97c2-e35c3e0dc9cd" providerId="ADAL" clId="{6B0B3B43-C1DE-4F71-93A9-FB02E1545C0E}" dt="2022-01-13T16:16:32.731" v="64"/>
-        <pc:sldMkLst>
-          <pc:docMk/>
-          <pc:sldMk cId="3996795517" sldId="317"/>
-        </pc:sldMkLst>
-      </pc:sldChg>
-      <pc:sldChg chg="modTransition">
-        <pc:chgData name="Castegnaro, Andrea" userId="e719bb20-b48f-4237-97c2-e35c3e0dc9cd" providerId="ADAL" clId="{6B0B3B43-C1DE-4F71-93A9-FB02E1545C0E}" dt="2022-01-13T16:16:32.731" v="64"/>
-        <pc:sldMkLst>
-          <pc:docMk/>
-          <pc:sldMk cId="2282461073" sldId="319"/>
-        </pc:sldMkLst>
-      </pc:sldChg>
-      <pc:sldChg chg="addSp delSp modSp add mod chgLayout">
-        <pc:chgData name="Castegnaro, Andrea" userId="e719bb20-b48f-4237-97c2-e35c3e0dc9cd" providerId="ADAL" clId="{6B0B3B43-C1DE-4F71-93A9-FB02E1545C0E}" dt="2022-01-17T15:04:59.362" v="281" actId="700"/>
-        <pc:sldMkLst>
-          <pc:docMk/>
-          <pc:sldMk cId="3098246948" sldId="320"/>
-        </pc:sldMkLst>
-      </pc:sldChg>
-      <pc:sldMasterChg chg="del addSldLayout delSldLayout">
-        <pc:chgData name="Castegnaro, Andrea" userId="e719bb20-b48f-4237-97c2-e35c3e0dc9cd" providerId="ADAL" clId="{6B0B3B43-C1DE-4F71-93A9-FB02E1545C0E}" dt="2022-01-13T16:14:43.903" v="1" actId="47"/>
-        <pc:sldMasterMkLst>
-          <pc:docMk/>
-          <pc:sldMasterMk cId="648575456" sldId="2147483648"/>
-        </pc:sldMasterMkLst>
-        <pc:sldLayoutChg chg="add del">
-          <pc:chgData name="Castegnaro, Andrea" userId="e719bb20-b48f-4237-97c2-e35c3e0dc9cd" providerId="ADAL" clId="{6B0B3B43-C1DE-4F71-93A9-FB02E1545C0E}" dt="2022-01-13T16:14:43.903" v="1" actId="47"/>
-          <pc:sldLayoutMkLst>
-            <pc:docMk/>
-            <pc:sldMasterMk cId="648575456" sldId="2147483648"/>
-            <pc:sldLayoutMk cId="1339338325" sldId="2147483649"/>
-          </pc:sldLayoutMkLst>
-        </pc:sldLayoutChg>
-      </pc:sldMasterChg>
-    </pc:docChg>
-  </pc:docChgLst>
-  <pc:docChgLst>
-    <pc:chgData name="Castegnaro, Andrea" userId="e719bb20-b48f-4237-97c2-e35c3e0dc9cd" providerId="ADAL" clId="{D0DDA42C-5D7A-4C2D-9DAF-C527848DC506}"/>
-    <pc:docChg chg="undo custSel modSld">
-      <pc:chgData name="Castegnaro, Andrea" userId="e719bb20-b48f-4237-97c2-e35c3e0dc9cd" providerId="ADAL" clId="{D0DDA42C-5D7A-4C2D-9DAF-C527848DC506}" dt="2024-01-19T10:49:54.422" v="210"/>
-      <pc:docMkLst>
-        <pc:docMk/>
-      </pc:docMkLst>
-      <pc:sldChg chg="modSp mod">
-        <pc:chgData name="Castegnaro, Andrea" userId="e719bb20-b48f-4237-97c2-e35c3e0dc9cd" providerId="ADAL" clId="{D0DDA42C-5D7A-4C2D-9DAF-C527848DC506}" dt="2024-01-19T09:25:33.200" v="0"/>
-        <pc:sldMkLst>
-          <pc:docMk/>
-          <pc:sldMk cId="2445713399" sldId="312"/>
-        </pc:sldMkLst>
-      </pc:sldChg>
-      <pc:sldChg chg="modNotesTx">
-        <pc:chgData name="Castegnaro, Andrea" userId="e719bb20-b48f-4237-97c2-e35c3e0dc9cd" providerId="ADAL" clId="{D0DDA42C-5D7A-4C2D-9DAF-C527848DC506}" dt="2024-01-19T09:36:44.309" v="30" actId="20577"/>
-        <pc:sldMkLst>
-          <pc:docMk/>
-          <pc:sldMk cId="3617399448" sldId="342"/>
-        </pc:sldMkLst>
-      </pc:sldChg>
-      <pc:sldChg chg="modNotesTx">
-        <pc:chgData name="Castegnaro, Andrea" userId="e719bb20-b48f-4237-97c2-e35c3e0dc9cd" providerId="ADAL" clId="{D0DDA42C-5D7A-4C2D-9DAF-C527848DC506}" dt="2024-01-19T10:49:54.422" v="210"/>
-        <pc:sldMkLst>
-          <pc:docMk/>
-          <pc:sldMk cId="2895304120" sldId="343"/>
-        </pc:sldMkLst>
-      </pc:sldChg>
-      <pc:sldChg chg="modNotesTx">
-        <pc:chgData name="Castegnaro, Andrea" userId="e719bb20-b48f-4237-97c2-e35c3e0dc9cd" providerId="ADAL" clId="{D0DDA42C-5D7A-4C2D-9DAF-C527848DC506}" dt="2024-01-19T10:43:51.391" v="189" actId="20577"/>
-        <pc:sldMkLst>
-          <pc:docMk/>
-          <pc:sldMk cId="1415608395" sldId="345"/>
-        </pc:sldMkLst>
-      </pc:sldChg>
-      <pc:sldChg chg="modNotesTx">
-        <pc:chgData name="Castegnaro, Andrea" userId="e719bb20-b48f-4237-97c2-e35c3e0dc9cd" providerId="ADAL" clId="{D0DDA42C-5D7A-4C2D-9DAF-C527848DC506}" dt="2024-01-19T10:46:43.630" v="198" actId="20577"/>
-        <pc:sldMkLst>
-          <pc:docMk/>
-          <pc:sldMk cId="930155706" sldId="346"/>
-        </pc:sldMkLst>
-      </pc:sldChg>
-      <pc:sldChg chg="modNotesTx">
-        <pc:chgData name="Castegnaro, Andrea" userId="e719bb20-b48f-4237-97c2-e35c3e0dc9cd" providerId="ADAL" clId="{D0DDA42C-5D7A-4C2D-9DAF-C527848DC506}" dt="2024-01-19T09:45:22.193" v="52"/>
-        <pc:sldMkLst>
-          <pc:docMk/>
-          <pc:sldMk cId="377400704" sldId="352"/>
-        </pc:sldMkLst>
-      </pc:sldChg>
-      <pc:sldChg chg="modSp mod modNotesTx">
-        <pc:chgData name="Castegnaro, Andrea" userId="e719bb20-b48f-4237-97c2-e35c3e0dc9cd" providerId="ADAL" clId="{D0DDA42C-5D7A-4C2D-9DAF-C527848DC506}" dt="2024-01-19T10:41:05.190" v="184"/>
-        <pc:sldMkLst>
-          <pc:docMk/>
-          <pc:sldMk cId="1945739754" sldId="353"/>
-        </pc:sldMkLst>
-      </pc:sldChg>
-      <pc:sldChg chg="modSp mod">
-        <pc:chgData name="Castegnaro, Andrea" userId="e719bb20-b48f-4237-97c2-e35c3e0dc9cd" providerId="ADAL" clId="{D0DDA42C-5D7A-4C2D-9DAF-C527848DC506}" dt="2024-01-19T09:28:49.418" v="3"/>
-        <pc:sldMkLst>
-          <pc:docMk/>
-          <pc:sldMk cId="4066632436" sldId="360"/>
-        </pc:sldMkLst>
       </pc:sldChg>
     </pc:docChg>
   </pc:docChgLst>
@@ -5928,26 +5928,26 @@
           <a:p>
             <a:pPr algn="ctr"/>
             <a:r>
-              <a:rPr lang="en-GB" sz="3200" dirty="0"/>
-              <a:t>Psychophysics Toolbox (PTB)</a:t>
+              <a:rPr lang="en-GB" sz="3600" dirty="0"/>
+              <a:t>Python's </a:t>
+            </a:r>
+            <a:r>
+              <a:rPr lang="en-GB" sz="3600" dirty="0" err="1"/>
+              <a:t>PsychoPy</a:t>
             </a:r>
             <a:br>
-              <a:rPr lang="en-GB" sz="3200" dirty="0"/>
+              <a:rPr lang="en-GB" sz="3600" dirty="0"/>
             </a:br>
             <a:r>
-              <a:rPr lang="en-GB" sz="3200" dirty="0"/>
+              <a:rPr lang="en-GB" sz="3200" i="1" dirty="0"/>
               <a:t>A Gentle Introduction </a:t>
             </a:r>
             <a:br>
-              <a:rPr lang="en-GB" sz="3200" dirty="0"/>
+              <a:rPr lang="en-GB" sz="3600" dirty="0"/>
             </a:br>
             <a:r>
-              <a:rPr lang="en-GB" sz="3200" dirty="0"/>
-              <a:t>(</a:t>
-            </a:r>
-            <a:r>
-              <a:rPr lang="en-GB" sz="3200"/>
-              <a:t>Part Two)</a:t>
+              <a:rPr lang="en-GB" sz="2400" i="1" dirty="0"/>
+              <a:t>(Part Two)</a:t>
             </a:r>
             <a:endParaRPr lang="en-GB" sz="3200" dirty="0"/>
           </a:p>
@@ -5977,7 +5977,7 @@
         </p:spPr>
         <p:txBody>
           <a:bodyPr>
-            <a:normAutofit lnSpcReduction="10000"/>
+            <a:normAutofit/>
           </a:bodyPr>
           <a:lstStyle/>
           <a:p>
@@ -6004,7 +6004,7 @@
             </a:pPr>
             <a:r>
               <a:rPr lang="en-GB" dirty="0"/>
-              <a:t>How to design psychological experiments using MATLAB</a:t>
+              <a:t>How to design psychological experiments using Python</a:t>
             </a:r>
           </a:p>
           <a:p>
@@ -6078,38 +6078,6 @@
               <a:buNone/>
             </a:pPr>
             <a:endParaRPr lang="en-GB" sz="2000" dirty="0"/>
-          </a:p>
-          <a:p>
-            <a:pPr marL="0" indent="0" algn="ctr">
-              <a:buNone/>
-            </a:pPr>
-            <a:r>
-              <a:rPr lang="en-GB" sz="2000" dirty="0"/>
-              <a:t>Course material: </a:t>
-            </a:r>
-            <a:r>
-              <a:rPr lang="en-GB" sz="1800" b="0" i="0" dirty="0">
-                <a:solidFill>
-                  <a:srgbClr val="228B22"/>
-                </a:solidFill>
-                <a:effectLst/>
-                <a:latin typeface="Menlo"/>
-              </a:rPr>
-              <a:t>https://moodle.ucl.ac.uk/course/view.php?id=35720</a:t>
-            </a:r>
-            <a:br>
-              <a:rPr lang="en-GB" sz="1800" b="0" i="0" dirty="0">
-                <a:solidFill>
-                  <a:srgbClr val="228B22"/>
-                </a:solidFill>
-                <a:effectLst/>
-                <a:latin typeface="Menlo"/>
-              </a:rPr>
-            </a:br>
-            <a:endParaRPr lang="en-GB" sz="1800" b="0" i="0" dirty="0">
-              <a:effectLst/>
-              <a:latin typeface="Menlo"/>
-            </a:endParaRPr>
           </a:p>
           <a:p>
             <a:pPr marL="0" indent="0" algn="ctr">
@@ -14047,7 +14015,7 @@
           <a:p>
             <a:r>
               <a:rPr lang="en-GB" dirty="0"/>
-              <a:t>PTB Resources</a:t>
+              <a:t>Resources</a:t>
             </a:r>
           </a:p>
         </p:txBody>
@@ -14080,9 +14048,8 @@
           </a:bodyPr>
           <a:lstStyle/>
           <a:p>
-            <a:pPr>
-              <a:buFont typeface="Arial" panose="020B0604020202020204" pitchFamily="34" charset="0"/>
-              <a:buChar char="•"/>
+            <a:pPr marL="0" indent="0">
+              <a:buNone/>
             </a:pPr>
             <a:r>
               <a:rPr lang="en-GB" dirty="0"/>
@@ -14092,14 +14059,13 @@
               <a:rPr lang="en-GB" dirty="0">
                 <a:hlinkClick r:id="rId2"/>
               </a:rPr>
-              <a:t>http://psychtoolbox.org/</a:t>
+              <a:t>https://www.psychopy.org</a:t>
             </a:r>
             <a:endParaRPr lang="en-GB" dirty="0"/>
           </a:p>
           <a:p>
-            <a:pPr>
-              <a:buFont typeface="Arial" panose="020B0604020202020204" pitchFamily="34" charset="0"/>
-              <a:buChar char="•"/>
+            <a:pPr marL="0" indent="0">
+              <a:buNone/>
             </a:pPr>
             <a:r>
               <a:rPr lang="en-GB" dirty="0"/>
@@ -14109,26 +14075,56 @@
               <a:rPr lang="en-GB" dirty="0">
                 <a:hlinkClick r:id="rId3"/>
               </a:rPr>
-              <a:t>http://psychtoolbox.org/docs/PsychBasic</a:t>
+              <a:t>https://www.psychopy.org/documentation.html</a:t>
             </a:r>
             <a:endParaRPr lang="en-GB" dirty="0"/>
           </a:p>
           <a:p>
-            <a:pPr>
-              <a:buFont typeface="Arial" panose="020B0604020202020204" pitchFamily="34" charset="0"/>
-              <a:buChar char="•"/>
+            <a:pPr marL="0" indent="0">
+              <a:buNone/>
             </a:pPr>
+            <a:endParaRPr lang="en-GB" dirty="0"/>
+          </a:p>
+          <a:p>
+            <a:pPr marL="0" indent="0">
+              <a:buNone/>
+            </a:pPr>
+            <a:endParaRPr lang="en-GB" dirty="0"/>
+          </a:p>
+          <a:p>
+            <a:pPr marL="0" indent="0">
+              <a:buNone/>
+            </a:pPr>
             <a:r>
               <a:rPr lang="en-GB" dirty="0"/>
-              <a:t>Tutorials: </a:t>
+              <a:t>Community forum: </a:t>
             </a:r>
             <a:r>
               <a:rPr lang="en-GB" dirty="0">
                 <a:hlinkClick r:id="rId4"/>
               </a:rPr>
-              <a:t>https://peterscarfe.com/ptbtutorials.html</a:t>
+              <a:t>https://discourse.psychopy.org/</a:t>
             </a:r>
             <a:endParaRPr lang="en-GB" dirty="0"/>
+          </a:p>
+          <a:p>
+            <a:pPr marL="0" indent="0">
+              <a:buNone/>
+            </a:pPr>
+            <a:r>
+              <a:rPr lang="en-GB" dirty="0"/>
+              <a:t>List of resources: </a:t>
+            </a:r>
+            <a:r>
+              <a:rPr lang="en-GB" dirty="0">
+                <a:hlinkClick r:id="rId5"/>
+              </a:rPr>
+              <a:t>https://psychopy.org/teaching/index.html</a:t>
+            </a:r>
+            <a:r>
+              <a:rPr lang="en-GB" dirty="0"/>
+              <a:t> </a:t>
+            </a:r>
           </a:p>
           <a:p>
             <a:pPr>
@@ -14141,35 +14137,49 @@
             <a:pPr marL="0" indent="0">
               <a:buNone/>
             </a:pPr>
-            <a:endParaRPr lang="en-GB" dirty="0"/>
-          </a:p>
-          <a:p>
-            <a:pPr marL="0" indent="0">
-              <a:buNone/>
+            <a:r>
+              <a:rPr lang="en-GB" dirty="0"/>
+              <a:t>For debugging:</a:t>
+            </a:r>
+          </a:p>
+          <a:p>
+            <a:pPr marL="457200" indent="-457200">
+              <a:buFont typeface="+mj-lt"/>
+              <a:buAutoNum type="arabicPeriod"/>
             </a:pPr>
-            <a:endParaRPr lang="en-GB" dirty="0"/>
-          </a:p>
-          <a:p>
-            <a:pPr>
-              <a:buFont typeface="Arial" panose="020B0604020202020204" pitchFamily="34" charset="0"/>
-              <a:buChar char="•"/>
+            <a:r>
+              <a:rPr lang="en-GB" dirty="0"/>
+              <a:t>ChatGPT (</a:t>
+            </a:r>
+            <a:r>
+              <a:rPr lang="en-GB" dirty="0">
+                <a:hlinkClick r:id="rId6"/>
+              </a:rPr>
+              <a:t>https://chat.openai.com/</a:t>
+            </a:r>
+            <a:r>
+              <a:rPr lang="en-GB" dirty="0"/>
+              <a:t>)</a:t>
+            </a:r>
+          </a:p>
+          <a:p>
+            <a:pPr marL="457200" indent="-457200">
+              <a:buFont typeface="+mj-lt"/>
+              <a:buAutoNum type="arabicPeriod"/>
             </a:pPr>
             <a:r>
               <a:rPr lang="en-GB" dirty="0"/>
-              <a:t>Community forum: </a:t>
-            </a:r>
-            <a:r>
-              <a:rPr lang="en-GB" dirty="0">
-                <a:hlinkClick r:id="rId5"/>
-              </a:rPr>
-              <a:t>https://psychtoolbox.discourse.group/</a:t>
-            </a:r>
-            <a:endParaRPr lang="en-GB" dirty="0"/>
-          </a:p>
-          <a:p>
-            <a:pPr>
-              <a:buFont typeface="Arial" panose="020B0604020202020204" pitchFamily="34" charset="0"/>
-              <a:buChar char="•"/>
+              <a:t>GitHub Copilot (Visual Studio / Visual Studio Code) </a:t>
+            </a:r>
+            <a:r>
+              <a:rPr lang="en-GB" i="1" dirty="0"/>
+              <a:t>– free for students</a:t>
+            </a:r>
+          </a:p>
+          <a:p>
+            <a:pPr marL="457200" indent="-457200">
+              <a:buFont typeface="+mj-lt"/>
+              <a:buAutoNum type="arabicPeriod"/>
             </a:pPr>
             <a:r>
               <a:rPr lang="en-GB" dirty="0"/>
@@ -14177,44 +14187,13 @@
             </a:r>
             <a:r>
               <a:rPr lang="en-GB" dirty="0">
-                <a:hlinkClick r:id="rId6"/>
+                <a:hlinkClick r:id="rId7"/>
               </a:rPr>
               <a:t>https://stackoverflow.com/</a:t>
             </a:r>
-            <a:endParaRPr lang="en-GB" dirty="0"/>
-          </a:p>
-          <a:p>
-            <a:pPr lvl="1">
-              <a:buFont typeface="Arial" panose="020B0604020202020204" pitchFamily="34" charset="0"/>
-              <a:buChar char="•"/>
-            </a:pPr>
             <a:r>
               <a:rPr lang="en-GB" dirty="0"/>
-              <a:t>(Tip: use square-brackets for specific tags)</a:t>
-            </a:r>
-          </a:p>
-          <a:p>
-            <a:pPr>
-              <a:buFont typeface="Arial" panose="020B0604020202020204" pitchFamily="34" charset="0"/>
-              <a:buChar char="•"/>
-            </a:pPr>
-            <a:r>
-              <a:rPr lang="en-GB" dirty="0" err="1"/>
-              <a:t>ChatGPT</a:t>
-            </a:r>
-            <a:r>
-              <a:rPr lang="en-GB" dirty="0"/>
-              <a:t>(</a:t>
-            </a:r>
-            <a:r>
-              <a:rPr lang="en-GB" dirty="0">
-                <a:hlinkClick r:id="rId7"/>
-              </a:rPr>
-              <a:t>https://chat.openai.com/chat</a:t>
-            </a:r>
-            <a:r>
-              <a:rPr lang="en-GB" dirty="0"/>
-              <a:t>)</a:t>
+              <a:t> (Tip: use square-brackets for specific tags)</a:t>
             </a:r>
           </a:p>
           <a:p>
@@ -14241,10 +14220,10 @@
       </p:sp>
       <p:pic>
         <p:nvPicPr>
-          <p:cNvPr id="5" name="Picture 4">
+          <p:cNvPr id="3" name="Graphic 2" descr="Open book outline">
             <a:extLst>
               <a:ext uri="{FF2B5EF4-FFF2-40B4-BE49-F238E27FC236}">
-                <a16:creationId xmlns:a16="http://schemas.microsoft.com/office/drawing/2014/main" id="{946E137A-3507-460F-92B7-F6F41D6667F3}"/>
+                <a16:creationId xmlns:a16="http://schemas.microsoft.com/office/drawing/2014/main" id="{2FACF68E-D86F-4282-B9E1-B5F86B9E8A69}"/>
               </a:ext>
             </a:extLst>
           </p:cNvPr>
@@ -14254,15 +14233,24 @@
           <p:nvPr/>
         </p:nvPicPr>
         <p:blipFill>
-          <a:blip r:embed="rId8"/>
+          <a:blip r:embed="rId8">
+            <a:extLst>
+              <a:ext uri="{28A0092B-C50C-407E-A947-70E740481C1C}">
+                <a14:useLocalDpi xmlns:a14="http://schemas.microsoft.com/office/drawing/2010/main" val="0"/>
+              </a:ext>
+              <a:ext uri="{96DAC541-7B7A-43D3-8B79-37D633B846F1}">
+                <asvg:svgBlip xmlns:asvg="http://schemas.microsoft.com/office/drawing/2016/SVG/main" r:embed="rId9"/>
+              </a:ext>
+            </a:extLst>
+          </a:blip>
           <a:stretch>
             <a:fillRect/>
           </a:stretch>
         </p:blipFill>
         <p:spPr>
           <a:xfrm>
-            <a:off x="775658" y="5840737"/>
-            <a:ext cx="10629900" cy="542925"/>
+            <a:off x="3403120" y="711971"/>
+            <a:ext cx="914400" cy="914400"/>
           </a:xfrm>
           <a:prstGeom prst="rect">
             <a:avLst/>
@@ -14271,10 +14259,10 @@
       </p:pic>
       <p:pic>
         <p:nvPicPr>
-          <p:cNvPr id="8" name="Graphic 3" descr="Storytelling with solid fill">
+          <p:cNvPr id="4" name="Picture 3">
             <a:extLst>
               <a:ext uri="{FF2B5EF4-FFF2-40B4-BE49-F238E27FC236}">
-                <a16:creationId xmlns:a16="http://schemas.microsoft.com/office/drawing/2014/main" id="{2B9FEF8A-207A-485E-9169-1A24666C9FE7}"/>
+                <a16:creationId xmlns:a16="http://schemas.microsoft.com/office/drawing/2014/main" id="{56FBEEB7-218D-39D4-D3EF-9FF467F155A3}"/>
               </a:ext>
             </a:extLst>
           </p:cNvPr>
@@ -14284,24 +14272,15 @@
           <p:nvPr/>
         </p:nvPicPr>
         <p:blipFill>
-          <a:blip r:embed="rId9" cstate="hqprint">
-            <a:extLst>
-              <a:ext uri="{28A0092B-C50C-407E-A947-70E740481C1C}">
-                <a14:useLocalDpi xmlns:a14="http://schemas.microsoft.com/office/drawing/2010/main" val="0"/>
-              </a:ext>
-              <a:ext uri="{96DAC541-7B7A-43D3-8B79-37D633B846F1}">
-                <asvg:svgBlip xmlns:asvg="http://schemas.microsoft.com/office/drawing/2016/SVG/main" r:embed="rId10"/>
-              </a:ext>
-            </a:extLst>
-          </a:blip>
+          <a:blip r:embed="rId10"/>
           <a:stretch>
             <a:fillRect/>
           </a:stretch>
         </p:blipFill>
         <p:spPr>
           <a:xfrm>
-            <a:off x="4774720" y="594569"/>
-            <a:ext cx="914400" cy="914400"/>
+            <a:off x="0" y="6316691"/>
+            <a:ext cx="12192000" cy="532436"/>
           </a:xfrm>
           <a:prstGeom prst="rect">
             <a:avLst/>
@@ -14311,7 +14290,7 @@
     </p:spTree>
     <p:extLst>
       <p:ext uri="{BB962C8B-B14F-4D97-AF65-F5344CB8AC3E}">
-        <p14:creationId xmlns:p14="http://schemas.microsoft.com/office/powerpoint/2010/main" val="3366187170"/>
+        <p14:creationId xmlns:p14="http://schemas.microsoft.com/office/powerpoint/2010/main" val="2047461375"/>
       </p:ext>
     </p:extLst>
   </p:cSld>
